--- a/deliverables/AI_UX_Pipeline_Demonstration_Guide.pptx
+++ b/deliverables/AI_UX_Pipeline_Demonstration_Guide.pptx
@@ -129,16 +129,24 @@
   <pc:docChgLst>
     <pc:chgData name="Karthikeyan S" userId="a4732f1a38b87db9" providerId="LiveId" clId="{80550256-044A-4469-BE78-DB2D0F5E3931}"/>
     <pc:docChg chg="modSld">
-      <pc:chgData name="Karthikeyan S" userId="a4732f1a38b87db9" providerId="LiveId" clId="{80550256-044A-4469-BE78-DB2D0F5E3931}" dt="2026-08-09T03:51:37.877" v="5" actId="1036"/>
+      <pc:chgData name="Karthikeyan S" userId="a4732f1a38b87db9" providerId="LiveId" clId="{80550256-044A-4469-BE78-DB2D0F5E3931}" dt="2026-08-09T06:30:20.691" v="30" actId="20577"/>
       <pc:docMkLst>
         <pc:docMk/>
       </pc:docMkLst>
       <pc:sldChg chg="modSp mod">
-        <pc:chgData name="Karthikeyan S" userId="a4732f1a38b87db9" providerId="LiveId" clId="{80550256-044A-4469-BE78-DB2D0F5E3931}" dt="2026-08-09T03:51:37.877" v="5" actId="1036"/>
+        <pc:chgData name="Karthikeyan S" userId="a4732f1a38b87db9" providerId="LiveId" clId="{80550256-044A-4469-BE78-DB2D0F5E3931}" dt="2026-08-09T06:30:20.691" v="30" actId="20577"/>
         <pc:sldMkLst>
           <pc:docMk/>
           <pc:sldMk cId="1190039912" sldId="256"/>
         </pc:sldMkLst>
+        <pc:spChg chg="mod">
+          <ac:chgData name="Karthikeyan S" userId="a4732f1a38b87db9" providerId="LiveId" clId="{80550256-044A-4469-BE78-DB2D0F5E3931}" dt="2026-08-09T06:30:20.691" v="30" actId="20577"/>
+          <ac:spMkLst>
+            <pc:docMk/>
+            <pc:sldMk cId="1190039912" sldId="256"/>
+            <ac:spMk id="5" creationId="{6EFBB05B-9A2D-4B30-A913-7A288FEA08AA}"/>
+          </ac:spMkLst>
+        </pc:spChg>
         <pc:spChg chg="mod">
           <ac:chgData name="Karthikeyan S" userId="a4732f1a38b87db9" providerId="LiveId" clId="{80550256-044A-4469-BE78-DB2D0F5E3931}" dt="2026-08-08T16:51:11.414" v="3" actId="20577"/>
           <ac:spMkLst>
@@ -1436,12 +1444,36 @@
               </a:defRPr>
             </a:pPr>
             <a:r>
+              <a:rPr sz="1800" b="0" dirty="0">
+                <a:solidFill>
+                  <a:srgbClr val="D7E9F8"/>
+                </a:solidFill>
+              </a:rPr>
+              <a:t>A governed multi-agent process that turns a </a:t>
+            </a:r>
+            <a:r>
+              <a:rPr lang="en-IN" sz="1800" b="0">
+                <a:solidFill>
+                  <a:srgbClr val="D7E9F8"/>
+                </a:solidFill>
+              </a:rPr>
+              <a:t>Users documents</a:t>
+            </a:r>
+            <a:r>
               <a:rPr sz="1800" b="0">
                 <a:solidFill>
                   <a:srgbClr val="D7E9F8"/>
                 </a:solidFill>
               </a:rPr>
-              <a:t>A governed multi-agent process that turns a BRD into a human-verified workable prototype.</a:t>
+              <a:t> </a:t>
+            </a:r>
+            <a:r>
+              <a:rPr sz="1800" b="0" dirty="0">
+                <a:solidFill>
+                  <a:srgbClr val="D7E9F8"/>
+                </a:solidFill>
+              </a:rPr>
+              <a:t>into a human-verified workable prototype.</a:t>
             </a:r>
           </a:p>
         </p:txBody>
